--- a/docs/onboarding/dabbler-onboarding.pptx
+++ b/docs/onboarding/dabbler-onboarding.pptx
@@ -5561,7 +5561,7 @@
                 <a:ea typeface="Segoe UI" pitchFamily="34" charset="-122"/>
                 <a:cs typeface="Segoe UI" pitchFamily="34" charset="-120"/>
               </a:rPr>
-              <a:t>Getting started with Claude Code or Codex</a:t>
+              <a:t>Getting started with Claude Code</a:t>
             </a:r>
             <a:endParaRPr lang="en-US" sz="2600" dirty="0"/>
           </a:p>
@@ -5645,7 +5645,7 @@
                 <a:ea typeface="Segoe UI" pitchFamily="34" charset="-122"/>
                 <a:cs typeface="Segoe UI" pitchFamily="34" charset="-120"/>
               </a:rPr>
-              <a:t>You need VS Code 1.135+, Node.js 22.18+, and Claude Code or Codex installed and signed in.</a:t>
+              <a:t>You need VS Code 1.135+, Node.js 22.18+, and Claude Code installed and signed in.</a:t>
             </a:r>
             <a:endParaRPr lang="en-US" sz="1300" dirty="0"/>
           </a:p>
